--- a/Python_Library.pptx
+++ b/Python_Library.pptx
@@ -9,6 +9,9 @@
     <p:sldId id="257" r:id="rId3"/>
     <p:sldId id="258" r:id="rId4"/>
     <p:sldId id="259" r:id="rId5"/>
+    <p:sldId id="260" r:id="rId6"/>
+    <p:sldId id="261" r:id="rId7"/>
+    <p:sldId id="262" r:id="rId8"/>
   </p:sldIdLst>
   <p:sldSz cx="12192000" cy="6858000"/>
   <p:notesSz cx="6858000" cy="9144000"/>
@@ -107,6 +110,11 @@
       </a:defRPr>
     </a:lvl9pPr>
   </p:defaultTextStyle>
+  <p:extLst>
+    <p:ext uri="{EFAFB233-063F-42B5-8137-9DF3F51BA10A}">
+      <p15:sldGuideLst xmlns:p15="http://schemas.microsoft.com/office/powerpoint/2012/main"/>
+    </p:ext>
+  </p:extLst>
 </p:presentation>
 </file>
 
@@ -116,104 +124,6 @@
     <p1510:client id="{E4F78B92-E588-4FF8-BB29-9AE9E88630D3}" v="17" dt="2026-07-10T12:47:19.551"/>
   </p1510:revLst>
 </p1510:revInfo>
-</file>
-
-<file path=ppt/changesInfos/changesInfo1.xml><?xml version="1.0" encoding="utf-8"?>
-<pc:chgInfo xmlns:a="http://schemas.openxmlformats.org/drawingml/2006/main" xmlns:r="http://schemas.openxmlformats.org/officeDocument/2006/relationships" xmlns:ac="http://schemas.microsoft.com/office/drawing/2013/main/command" xmlns:pc="http://schemas.microsoft.com/office/powerpoint/2013/main/command">
-  <pc:docChgLst>
-    <pc:chgData name="Srilekha Chundu" userId="49a084bb-9a89-4e71-84e0-8baa9b883932" providerId="ADAL" clId="{FFAA7A55-6EDE-408F-B9B3-D3DCD33309A1}"/>
-    <pc:docChg chg="custSel addSld modSld">
-      <pc:chgData name="Srilekha Chundu" userId="49a084bb-9a89-4e71-84e0-8baa9b883932" providerId="ADAL" clId="{FFAA7A55-6EDE-408F-B9B3-D3DCD33309A1}" dt="2026-07-10T12:47:19.551" v="426"/>
-      <pc:docMkLst>
-        <pc:docMk/>
-      </pc:docMkLst>
-      <pc:sldChg chg="delSp modSp new mod">
-        <pc:chgData name="Srilekha Chundu" userId="49a084bb-9a89-4e71-84e0-8baa9b883932" providerId="ADAL" clId="{FFAA7A55-6EDE-408F-B9B3-D3DCD33309A1}" dt="2026-07-10T12:41:15.996" v="348" actId="478"/>
-        <pc:sldMkLst>
-          <pc:docMk/>
-          <pc:sldMk cId="2552538047" sldId="256"/>
-        </pc:sldMkLst>
-        <pc:spChg chg="mod">
-          <ac:chgData name="Srilekha Chundu" userId="49a084bb-9a89-4e71-84e0-8baa9b883932" providerId="ADAL" clId="{FFAA7A55-6EDE-408F-B9B3-D3DCD33309A1}" dt="2026-07-10T12:02:36.748" v="2" actId="1076"/>
-          <ac:spMkLst>
-            <pc:docMk/>
-            <pc:sldMk cId="2552538047" sldId="256"/>
-            <ac:spMk id="2" creationId="{4393BB9C-7F55-CB0E-07E2-A7619CC930D0}"/>
-          </ac:spMkLst>
-        </pc:spChg>
-        <pc:spChg chg="del mod">
-          <ac:chgData name="Srilekha Chundu" userId="49a084bb-9a89-4e71-84e0-8baa9b883932" providerId="ADAL" clId="{FFAA7A55-6EDE-408F-B9B3-D3DCD33309A1}" dt="2026-07-10T12:41:15.996" v="348" actId="478"/>
-          <ac:spMkLst>
-            <pc:docMk/>
-            <pc:sldMk cId="2552538047" sldId="256"/>
-            <ac:spMk id="3" creationId="{96C14432-ED59-6C93-0C65-D396F000BF94}"/>
-          </ac:spMkLst>
-        </pc:spChg>
-      </pc:sldChg>
-      <pc:sldChg chg="addSp modSp new mod">
-        <pc:chgData name="Srilekha Chundu" userId="49a084bb-9a89-4e71-84e0-8baa9b883932" providerId="ADAL" clId="{FFAA7A55-6EDE-408F-B9B3-D3DCD33309A1}" dt="2026-07-10T12:14:00.164" v="83" actId="20577"/>
-        <pc:sldMkLst>
-          <pc:docMk/>
-          <pc:sldMk cId="2926024458" sldId="257"/>
-        </pc:sldMkLst>
-        <pc:spChg chg="add mod">
-          <ac:chgData name="Srilekha Chundu" userId="49a084bb-9a89-4e71-84e0-8baa9b883932" providerId="ADAL" clId="{FFAA7A55-6EDE-408F-B9B3-D3DCD33309A1}" dt="2026-07-10T12:14:00.164" v="83" actId="20577"/>
-          <ac:spMkLst>
-            <pc:docMk/>
-            <pc:sldMk cId="2926024458" sldId="257"/>
-            <ac:spMk id="2" creationId="{5ECC0D50-E9C9-8B5A-C967-1149F22D3E83}"/>
-          </ac:spMkLst>
-        </pc:spChg>
-      </pc:sldChg>
-      <pc:sldChg chg="addSp delSp modSp new mod">
-        <pc:chgData name="Srilekha Chundu" userId="49a084bb-9a89-4e71-84e0-8baa9b883932" providerId="ADAL" clId="{FFAA7A55-6EDE-408F-B9B3-D3DCD33309A1}" dt="2026-07-10T12:34:13.651" v="345"/>
-        <pc:sldMkLst>
-          <pc:docMk/>
-          <pc:sldMk cId="3919080805" sldId="258"/>
-        </pc:sldMkLst>
-        <pc:spChg chg="add mod">
-          <ac:chgData name="Srilekha Chundu" userId="49a084bb-9a89-4e71-84e0-8baa9b883932" providerId="ADAL" clId="{FFAA7A55-6EDE-408F-B9B3-D3DCD33309A1}" dt="2026-07-10T12:27:22.336" v="330" actId="20577"/>
-          <ac:spMkLst>
-            <pc:docMk/>
-            <pc:sldMk cId="3919080805" sldId="258"/>
-            <ac:spMk id="2" creationId="{2421D885-39A9-6D1B-6FBC-966D64EE82A7}"/>
-          </ac:spMkLst>
-        </pc:spChg>
-        <pc:spChg chg="add del mod">
-          <ac:chgData name="Srilekha Chundu" userId="49a084bb-9a89-4e71-84e0-8baa9b883932" providerId="ADAL" clId="{FFAA7A55-6EDE-408F-B9B3-D3DCD33309A1}" dt="2026-07-10T12:34:13.651" v="345"/>
-          <ac:spMkLst>
-            <pc:docMk/>
-            <pc:sldMk cId="3919080805" sldId="258"/>
-            <ac:spMk id="3" creationId="{645CDDA2-6DAD-6A78-48D8-6925D22C2A2F}"/>
-          </ac:spMkLst>
-        </pc:spChg>
-        <pc:picChg chg="add mod">
-          <ac:chgData name="Srilekha Chundu" userId="49a084bb-9a89-4e71-84e0-8baa9b883932" providerId="ADAL" clId="{FFAA7A55-6EDE-408F-B9B3-D3DCD33309A1}" dt="2026-07-10T12:33:57.669" v="342" actId="1076"/>
-          <ac:picMkLst>
-            <pc:docMk/>
-            <pc:sldMk cId="3919080805" sldId="258"/>
-            <ac:picMk id="5" creationId="{D0D70E27-0F65-CF1B-CC2C-95B32917EC56}"/>
-          </ac:picMkLst>
-        </pc:picChg>
-      </pc:sldChg>
-      <pc:sldChg chg="addSp modSp new mod">
-        <pc:chgData name="Srilekha Chundu" userId="49a084bb-9a89-4e71-84e0-8baa9b883932" providerId="ADAL" clId="{FFAA7A55-6EDE-408F-B9B3-D3DCD33309A1}" dt="2026-07-10T12:47:19.551" v="426"/>
-        <pc:sldMkLst>
-          <pc:docMk/>
-          <pc:sldMk cId="1205480519" sldId="259"/>
-        </pc:sldMkLst>
-        <pc:spChg chg="add mod">
-          <ac:chgData name="Srilekha Chundu" userId="49a084bb-9a89-4e71-84e0-8baa9b883932" providerId="ADAL" clId="{FFAA7A55-6EDE-408F-B9B3-D3DCD33309A1}" dt="2026-07-10T12:47:19.551" v="426"/>
-          <ac:spMkLst>
-            <pc:docMk/>
-            <pc:sldMk cId="1205480519" sldId="259"/>
-            <ac:spMk id="2" creationId="{4DCB68A4-536C-F450-170B-DC621B2938B9}"/>
-          </ac:spMkLst>
-        </pc:spChg>
-      </pc:sldChg>
-    </pc:docChg>
-  </pc:docChgLst>
-</pc:chgInfo>
 </file>
 
 <file path=ppt/slideLayouts/slideLayout1.xml><?xml version="1.0" encoding="utf-8"?>
@@ -365,7 +275,7 @@
           <a:p>
             <a:fld id="{1E29E131-89F4-4BF3-B8CF-85E9E906BC4C}" type="datetimeFigureOut">
               <a:rPr lang="en-IN" smtClean="0"/>
-              <a:t>10-07-2026</a:t>
+              <a:t>12-07-2026</a:t>
             </a:fld>
             <a:endParaRPr lang="en-IN"/>
           </a:p>
@@ -565,7 +475,7 @@
           <a:p>
             <a:fld id="{1E29E131-89F4-4BF3-B8CF-85E9E906BC4C}" type="datetimeFigureOut">
               <a:rPr lang="en-IN" smtClean="0"/>
-              <a:t>10-07-2026</a:t>
+              <a:t>12-07-2026</a:t>
             </a:fld>
             <a:endParaRPr lang="en-IN"/>
           </a:p>
@@ -775,7 +685,7 @@
           <a:p>
             <a:fld id="{1E29E131-89F4-4BF3-B8CF-85E9E906BC4C}" type="datetimeFigureOut">
               <a:rPr lang="en-IN" smtClean="0"/>
-              <a:t>10-07-2026</a:t>
+              <a:t>12-07-2026</a:t>
             </a:fld>
             <a:endParaRPr lang="en-IN"/>
           </a:p>
@@ -975,7 +885,7 @@
           <a:p>
             <a:fld id="{1E29E131-89F4-4BF3-B8CF-85E9E906BC4C}" type="datetimeFigureOut">
               <a:rPr lang="en-IN" smtClean="0"/>
-              <a:t>10-07-2026</a:t>
+              <a:t>12-07-2026</a:t>
             </a:fld>
             <a:endParaRPr lang="en-IN"/>
           </a:p>
@@ -1251,7 +1161,7 @@
           <a:p>
             <a:fld id="{1E29E131-89F4-4BF3-B8CF-85E9E906BC4C}" type="datetimeFigureOut">
               <a:rPr lang="en-IN" smtClean="0"/>
-              <a:t>10-07-2026</a:t>
+              <a:t>12-07-2026</a:t>
             </a:fld>
             <a:endParaRPr lang="en-IN"/>
           </a:p>
@@ -1519,7 +1429,7 @@
           <a:p>
             <a:fld id="{1E29E131-89F4-4BF3-B8CF-85E9E906BC4C}" type="datetimeFigureOut">
               <a:rPr lang="en-IN" smtClean="0"/>
-              <a:t>10-07-2026</a:t>
+              <a:t>12-07-2026</a:t>
             </a:fld>
             <a:endParaRPr lang="en-IN"/>
           </a:p>
@@ -1934,7 +1844,7 @@
           <a:p>
             <a:fld id="{1E29E131-89F4-4BF3-B8CF-85E9E906BC4C}" type="datetimeFigureOut">
               <a:rPr lang="en-IN" smtClean="0"/>
-              <a:t>10-07-2026</a:t>
+              <a:t>12-07-2026</a:t>
             </a:fld>
             <a:endParaRPr lang="en-IN"/>
           </a:p>
@@ -2076,7 +1986,7 @@
           <a:p>
             <a:fld id="{1E29E131-89F4-4BF3-B8CF-85E9E906BC4C}" type="datetimeFigureOut">
               <a:rPr lang="en-IN" smtClean="0"/>
-              <a:t>10-07-2026</a:t>
+              <a:t>12-07-2026</a:t>
             </a:fld>
             <a:endParaRPr lang="en-IN"/>
           </a:p>
@@ -2189,7 +2099,7 @@
           <a:p>
             <a:fld id="{1E29E131-89F4-4BF3-B8CF-85E9E906BC4C}" type="datetimeFigureOut">
               <a:rPr lang="en-IN" smtClean="0"/>
-              <a:t>10-07-2026</a:t>
+              <a:t>12-07-2026</a:t>
             </a:fld>
             <a:endParaRPr lang="en-IN"/>
           </a:p>
@@ -2502,7 +2412,7 @@
           <a:p>
             <a:fld id="{1E29E131-89F4-4BF3-B8CF-85E9E906BC4C}" type="datetimeFigureOut">
               <a:rPr lang="en-IN" smtClean="0"/>
-              <a:t>10-07-2026</a:t>
+              <a:t>12-07-2026</a:t>
             </a:fld>
             <a:endParaRPr lang="en-IN"/>
           </a:p>
@@ -2791,7 +2701,7 @@
           <a:p>
             <a:fld id="{1E29E131-89F4-4BF3-B8CF-85E9E906BC4C}" type="datetimeFigureOut">
               <a:rPr lang="en-IN" smtClean="0"/>
-              <a:t>10-07-2026</a:t>
+              <a:t>12-07-2026</a:t>
             </a:fld>
             <a:endParaRPr lang="en-IN"/>
           </a:p>
@@ -3034,7 +2944,7 @@
           <a:p>
             <a:fld id="{1E29E131-89F4-4BF3-B8CF-85E9E906BC4C}" type="datetimeFigureOut">
               <a:rPr lang="en-IN" smtClean="0"/>
-              <a:t>10-07-2026</a:t>
+              <a:t>12-07-2026</a:t>
             </a:fld>
             <a:endParaRPr lang="en-IN"/>
           </a:p>
@@ -3844,7 +3754,7 @@
         <p:spPr>
           <a:xfrm>
             <a:off x="413657" y="435429"/>
-            <a:ext cx="11342914" cy="2585323"/>
+            <a:ext cx="11342914" cy="6740307"/>
           </a:xfrm>
           <a:prstGeom prst="rect">
             <a:avLst/>
@@ -3865,6 +3775,12 @@
           <a:p>
             <a:r>
               <a:rPr lang="en-IN" dirty="0"/>
+              <a:t>Artificial Intelligence is much more than writing simple programs. </a:t>
+            </a:r>
+          </a:p>
+          <a:p>
+            <a:r>
+              <a:rPr lang="en-IN" dirty="0"/>
               <a:t>Processing Large Data</a:t>
             </a:r>
           </a:p>
@@ -3877,12 +3793,6 @@
           <a:p>
             <a:r>
               <a:rPr lang="en-IN" dirty="0"/>
-              <a:t>Mathematical Calculations</a:t>
-            </a:r>
-          </a:p>
-          <a:p>
-            <a:r>
-              <a:rPr lang="en-IN" dirty="0"/>
               <a:t>Neural Networks</a:t>
             </a:r>
           </a:p>
@@ -3897,9 +3807,130 @@
           </a:p>
           <a:p>
             <a:r>
-              <a:rPr lang="en-IN"/>
-              <a:t>Processing Large Data</a:t>
-            </a:r>
+              <a:rPr lang="en-IN" dirty="0"/>
+              <a:t>Processing Large Data:</a:t>
+            </a:r>
+          </a:p>
+          <a:p>
+            <a:r>
+              <a:rPr lang="en-IN" dirty="0"/>
+              <a:t>AI models learn from data. The quality and quantity of data directly affect model performance.</a:t>
+            </a:r>
+          </a:p>
+          <a:p>
+            <a:r>
+              <a:rPr lang="en-IN" dirty="0"/>
+              <a:t>Examples:</a:t>
+            </a:r>
+          </a:p>
+          <a:p>
+            <a:r>
+              <a:rPr lang="en-IN" dirty="0"/>
+              <a:t>Netflix </a:t>
+            </a:r>
+            <a:r>
+              <a:rPr lang="en-IN" dirty="0" err="1"/>
+              <a:t>analyzes</a:t>
+            </a:r>
+            <a:r>
+              <a:rPr lang="en-IN" dirty="0"/>
+              <a:t> millions of viewing records. </a:t>
+            </a:r>
+          </a:p>
+          <a:p>
+            <a:r>
+              <a:rPr lang="en-IN" dirty="0"/>
+              <a:t>Amazon processes millions of purchase histories.</a:t>
+            </a:r>
+          </a:p>
+          <a:p>
+            <a:endParaRPr lang="en-IN" dirty="0"/>
+          </a:p>
+          <a:p>
+            <a:r>
+              <a:rPr lang="en-IN" dirty="0"/>
+              <a:t>Performing Complex Mathematical Calculations:</a:t>
+            </a:r>
+          </a:p>
+          <a:p>
+            <a:r>
+              <a:rPr lang="en-IN" dirty="0"/>
+              <a:t>Machine Learning is built on mathematics.</a:t>
+            </a:r>
+          </a:p>
+          <a:p>
+            <a:r>
+              <a:rPr lang="en-IN" dirty="0"/>
+              <a:t>Ex:-  </a:t>
+            </a:r>
+            <a:r>
+              <a:rPr lang="pt-BR" dirty="0"/>
+              <a:t>A = [1 2]            B = [5 6]</a:t>
+            </a:r>
+          </a:p>
+          <a:p>
+            <a:r>
+              <a:rPr lang="pt-BR" dirty="0"/>
+              <a:t>                 [3 4]                     [7 8]</a:t>
+            </a:r>
+          </a:p>
+          <a:p>
+            <a:endParaRPr lang="pt-BR" dirty="0"/>
+          </a:p>
+          <a:p>
+            <a:r>
+              <a:rPr lang="pt-BR" dirty="0"/>
+              <a:t>Using Libraries</a:t>
+            </a:r>
+          </a:p>
+          <a:p>
+            <a:r>
+              <a:rPr lang="en-US" dirty="0"/>
+              <a:t>import </a:t>
+            </a:r>
+            <a:r>
+              <a:rPr lang="en-US" dirty="0" err="1"/>
+              <a:t>numpy</a:t>
+            </a:r>
+            <a:r>
+              <a:rPr lang="en-US" dirty="0"/>
+              <a:t> as np</a:t>
+            </a:r>
+          </a:p>
+          <a:p>
+            <a:r>
+              <a:rPr lang="en-US" dirty="0"/>
+              <a:t>A = </a:t>
+            </a:r>
+            <a:r>
+              <a:rPr lang="en-US" dirty="0" err="1"/>
+              <a:t>np.array</a:t>
+            </a:r>
+            <a:r>
+              <a:rPr lang="en-US" dirty="0"/>
+              <a:t>([[1,2],[3,4]])</a:t>
+            </a:r>
+          </a:p>
+          <a:p>
+            <a:r>
+              <a:rPr lang="en-US" dirty="0"/>
+              <a:t>B = </a:t>
+            </a:r>
+            <a:r>
+              <a:rPr lang="en-US" dirty="0" err="1"/>
+              <a:t>np.array</a:t>
+            </a:r>
+            <a:r>
+              <a:rPr lang="en-US" dirty="0"/>
+              <a:t>([[5,6],[7,8]])</a:t>
+            </a:r>
+          </a:p>
+          <a:p>
+            <a:r>
+              <a:rPr lang="en-US" dirty="0"/>
+              <a:t>print(np.dot(A,B))</a:t>
+            </a:r>
+            <a:endParaRPr lang="en-IN" dirty="0"/>
           </a:p>
           <a:p>
             <a:endParaRPr lang="en-IN" dirty="0"/>
@@ -3910,6 +3941,772 @@
     <p:extLst>
       <p:ext uri="{BB962C8B-B14F-4D97-AF65-F5344CB8AC3E}">
         <p14:creationId xmlns:p14="http://schemas.microsoft.com/office/powerpoint/2010/main" val="1205480519"/>
+      </p:ext>
+    </p:extLst>
+  </p:cSld>
+  <p:clrMapOvr>
+    <a:masterClrMapping/>
+  </p:clrMapOvr>
+</p:sld>
+</file>
+
+<file path=ppt/slides/slide5.xml><?xml version="1.0" encoding="utf-8"?>
+<p:sld xmlns:a="http://schemas.openxmlformats.org/drawingml/2006/main" xmlns:r="http://schemas.openxmlformats.org/officeDocument/2006/relationships" xmlns:p="http://schemas.openxmlformats.org/presentationml/2006/main">
+  <p:cSld>
+    <p:spTree>
+      <p:nvGrpSpPr>
+        <p:cNvPr id="1" name=""/>
+        <p:cNvGrpSpPr/>
+        <p:nvPr/>
+      </p:nvGrpSpPr>
+      <p:grpSpPr>
+        <a:xfrm>
+          <a:off x="0" y="0"/>
+          <a:ext cx="0" cy="0"/>
+          <a:chOff x="0" y="0"/>
+          <a:chExt cx="0" cy="0"/>
+        </a:xfrm>
+      </p:grpSpPr>
+      <p:sp>
+        <p:nvSpPr>
+          <p:cNvPr id="2" name="TextBox 1">
+            <a:extLst>
+              <a:ext uri="{FF2B5EF4-FFF2-40B4-BE49-F238E27FC236}">
+                <a16:creationId xmlns:a16="http://schemas.microsoft.com/office/drawing/2014/main" id="{0F105059-8379-7F79-64D0-BCB729305708}"/>
+              </a:ext>
+            </a:extLst>
+          </p:cNvPr>
+          <p:cNvSpPr txBox="1"/>
+          <p:nvPr/>
+        </p:nvSpPr>
+        <p:spPr>
+          <a:xfrm>
+            <a:off x="481263" y="673768"/>
+            <a:ext cx="11277600" cy="2031325"/>
+          </a:xfrm>
+          <a:prstGeom prst="rect">
+            <a:avLst/>
+          </a:prstGeom>
+          <a:noFill/>
+        </p:spPr>
+        <p:txBody>
+          <a:bodyPr wrap="square" rtlCol="0">
+            <a:spAutoFit/>
+          </a:bodyPr>
+          <a:lstStyle/>
+          <a:p>
+            <a:r>
+              <a:rPr lang="en-IN" dirty="0"/>
+              <a:t>Training Machine Learning Models</a:t>
+            </a:r>
+          </a:p>
+          <a:p>
+            <a:r>
+              <a:rPr lang="en-IN" dirty="0"/>
+              <a:t>The main goal of Machine Learning is to teach computers to learn from data.</a:t>
+            </a:r>
+          </a:p>
+          <a:p>
+            <a:r>
+              <a:rPr lang="en-IN" dirty="0"/>
+              <a:t>Training means:- </a:t>
+            </a:r>
+          </a:p>
+          <a:p>
+            <a:r>
+              <a:rPr lang="en-IN" dirty="0"/>
+              <a:t>Providing data to a model. </a:t>
+            </a:r>
+          </a:p>
+          <a:p>
+            <a:r>
+              <a:rPr lang="en-IN" dirty="0"/>
+              <a:t>Allowing it to learn patterns. </a:t>
+            </a:r>
+          </a:p>
+          <a:p>
+            <a:r>
+              <a:rPr lang="en-IN" dirty="0"/>
+              <a:t>Using those patterns to make predictions.</a:t>
+            </a:r>
+          </a:p>
+          <a:p>
+            <a:endParaRPr lang="en-IN" dirty="0"/>
+          </a:p>
+        </p:txBody>
+      </p:sp>
+      <p:graphicFrame>
+        <p:nvGraphicFramePr>
+          <p:cNvPr id="3" name="Table 2">
+            <a:extLst>
+              <a:ext uri="{FF2B5EF4-FFF2-40B4-BE49-F238E27FC236}">
+                <a16:creationId xmlns:a16="http://schemas.microsoft.com/office/drawing/2014/main" id="{146EFF55-2C9E-7A07-45D7-A2F5B29A58F6}"/>
+              </a:ext>
+            </a:extLst>
+          </p:cNvPr>
+          <p:cNvGraphicFramePr>
+            <a:graphicFrameLocks noGrp="1"/>
+          </p:cNvGraphicFramePr>
+          <p:nvPr>
+            <p:extLst>
+              <p:ext uri="{D42A27DB-BD31-4B8C-83A1-F6EECF244321}">
+                <p14:modId xmlns:p14="http://schemas.microsoft.com/office/powerpoint/2010/main" val="4258673270"/>
+              </p:ext>
+            </p:extLst>
+          </p:nvPr>
+        </p:nvGraphicFramePr>
+        <p:xfrm>
+          <a:off x="721895" y="3269774"/>
+          <a:ext cx="10631906" cy="1463040"/>
+        </p:xfrm>
+        <a:graphic>
+          <a:graphicData uri="http://schemas.openxmlformats.org/drawingml/2006/table">
+            <a:tbl>
+              <a:tblPr/>
+              <a:tblGrid>
+                <a:gridCol w="5315953">
+                  <a:extLst>
+                    <a:ext uri="{9D8B030D-6E8A-4147-A177-3AD203B41FA5}">
+                      <a16:colId xmlns:a16="http://schemas.microsoft.com/office/drawing/2014/main" val="3304424881"/>
+                    </a:ext>
+                  </a:extLst>
+                </a:gridCol>
+                <a:gridCol w="5315953">
+                  <a:extLst>
+                    <a:ext uri="{9D8B030D-6E8A-4147-A177-3AD203B41FA5}">
+                      <a16:colId xmlns:a16="http://schemas.microsoft.com/office/drawing/2014/main" val="1091414115"/>
+                    </a:ext>
+                  </a:extLst>
+                </a:gridCol>
+              </a:tblGrid>
+              <a:tr h="0">
+                <a:tc>
+                  <a:txBody>
+                    <a:bodyPr/>
+                    <a:lstStyle/>
+                    <a:p>
+                      <a:pPr>
+                        <a:buNone/>
+                      </a:pPr>
+                      <a:r>
+                        <a:rPr lang="en-IN" dirty="0"/>
+                        <a:t>Hours Studied</a:t>
+                      </a:r>
+                    </a:p>
+                  </a:txBody>
+                  <a:tcPr anchor="ctr">
+                    <a:lnL>
+                      <a:noFill/>
+                    </a:lnL>
+                    <a:lnR>
+                      <a:noFill/>
+                    </a:lnR>
+                    <a:lnT>
+                      <a:noFill/>
+                    </a:lnT>
+                    <a:lnB>
+                      <a:noFill/>
+                    </a:lnB>
+                    <a:noFill/>
+                  </a:tcPr>
+                </a:tc>
+                <a:tc>
+                  <a:txBody>
+                    <a:bodyPr/>
+                    <a:lstStyle/>
+                    <a:p>
+                      <a:pPr>
+                        <a:buNone/>
+                      </a:pPr>
+                      <a:r>
+                        <a:rPr lang="en-IN"/>
+                        <a:t>Marks</a:t>
+                      </a:r>
+                    </a:p>
+                  </a:txBody>
+                  <a:tcPr anchor="ctr">
+                    <a:lnL>
+                      <a:noFill/>
+                    </a:lnL>
+                    <a:lnR>
+                      <a:noFill/>
+                    </a:lnR>
+                    <a:lnT>
+                      <a:noFill/>
+                    </a:lnT>
+                    <a:lnB>
+                      <a:noFill/>
+                    </a:lnB>
+                    <a:noFill/>
+                  </a:tcPr>
+                </a:tc>
+                <a:extLst>
+                  <a:ext uri="{0D108BD9-81ED-4DB2-BD59-A6C34878D82A}">
+                    <a16:rowId xmlns:a16="http://schemas.microsoft.com/office/drawing/2014/main" val="84705739"/>
+                  </a:ext>
+                </a:extLst>
+              </a:tr>
+              <a:tr h="0">
+                <a:tc>
+                  <a:txBody>
+                    <a:bodyPr/>
+                    <a:lstStyle/>
+                    <a:p>
+                      <a:pPr>
+                        <a:buNone/>
+                      </a:pPr>
+                      <a:r>
+                        <a:rPr lang="en-IN" dirty="0"/>
+                        <a:t>2</a:t>
+                      </a:r>
+                    </a:p>
+                  </a:txBody>
+                  <a:tcPr anchor="ctr">
+                    <a:lnL>
+                      <a:noFill/>
+                    </a:lnL>
+                    <a:lnR>
+                      <a:noFill/>
+                    </a:lnR>
+                    <a:lnT>
+                      <a:noFill/>
+                    </a:lnT>
+                    <a:lnB>
+                      <a:noFill/>
+                    </a:lnB>
+                    <a:noFill/>
+                  </a:tcPr>
+                </a:tc>
+                <a:tc>
+                  <a:txBody>
+                    <a:bodyPr/>
+                    <a:lstStyle/>
+                    <a:p>
+                      <a:pPr>
+                        <a:buNone/>
+                      </a:pPr>
+                      <a:r>
+                        <a:rPr lang="en-IN"/>
+                        <a:t>40</a:t>
+                      </a:r>
+                    </a:p>
+                  </a:txBody>
+                  <a:tcPr anchor="ctr">
+                    <a:lnL>
+                      <a:noFill/>
+                    </a:lnL>
+                    <a:lnR>
+                      <a:noFill/>
+                    </a:lnR>
+                    <a:lnT>
+                      <a:noFill/>
+                    </a:lnT>
+                    <a:lnB>
+                      <a:noFill/>
+                    </a:lnB>
+                    <a:noFill/>
+                  </a:tcPr>
+                </a:tc>
+                <a:extLst>
+                  <a:ext uri="{0D108BD9-81ED-4DB2-BD59-A6C34878D82A}">
+                    <a16:rowId xmlns:a16="http://schemas.microsoft.com/office/drawing/2014/main" val="459307790"/>
+                  </a:ext>
+                </a:extLst>
+              </a:tr>
+              <a:tr h="0">
+                <a:tc>
+                  <a:txBody>
+                    <a:bodyPr/>
+                    <a:lstStyle/>
+                    <a:p>
+                      <a:pPr>
+                        <a:buNone/>
+                      </a:pPr>
+                      <a:r>
+                        <a:rPr lang="en-IN"/>
+                        <a:t>4</a:t>
+                      </a:r>
+                    </a:p>
+                  </a:txBody>
+                  <a:tcPr anchor="ctr">
+                    <a:lnL>
+                      <a:noFill/>
+                    </a:lnL>
+                    <a:lnR>
+                      <a:noFill/>
+                    </a:lnR>
+                    <a:lnT>
+                      <a:noFill/>
+                    </a:lnT>
+                    <a:lnB>
+                      <a:noFill/>
+                    </a:lnB>
+                    <a:noFill/>
+                  </a:tcPr>
+                </a:tc>
+                <a:tc>
+                  <a:txBody>
+                    <a:bodyPr/>
+                    <a:lstStyle/>
+                    <a:p>
+                      <a:pPr>
+                        <a:buNone/>
+                      </a:pPr>
+                      <a:r>
+                        <a:rPr lang="en-IN"/>
+                        <a:t>60</a:t>
+                      </a:r>
+                    </a:p>
+                  </a:txBody>
+                  <a:tcPr anchor="ctr">
+                    <a:lnL>
+                      <a:noFill/>
+                    </a:lnL>
+                    <a:lnR>
+                      <a:noFill/>
+                    </a:lnR>
+                    <a:lnT>
+                      <a:noFill/>
+                    </a:lnT>
+                    <a:lnB>
+                      <a:noFill/>
+                    </a:lnB>
+                    <a:noFill/>
+                  </a:tcPr>
+                </a:tc>
+                <a:extLst>
+                  <a:ext uri="{0D108BD9-81ED-4DB2-BD59-A6C34878D82A}">
+                    <a16:rowId xmlns:a16="http://schemas.microsoft.com/office/drawing/2014/main" val="2510516783"/>
+                  </a:ext>
+                </a:extLst>
+              </a:tr>
+              <a:tr h="0">
+                <a:tc>
+                  <a:txBody>
+                    <a:bodyPr/>
+                    <a:lstStyle/>
+                    <a:p>
+                      <a:pPr>
+                        <a:buNone/>
+                      </a:pPr>
+                      <a:r>
+                        <a:rPr lang="en-IN" dirty="0"/>
+                        <a:t>6</a:t>
+                      </a:r>
+                    </a:p>
+                  </a:txBody>
+                  <a:tcPr anchor="ctr">
+                    <a:lnL>
+                      <a:noFill/>
+                    </a:lnL>
+                    <a:lnR>
+                      <a:noFill/>
+                    </a:lnR>
+                    <a:lnT>
+                      <a:noFill/>
+                    </a:lnT>
+                    <a:lnB>
+                      <a:noFill/>
+                    </a:lnB>
+                    <a:noFill/>
+                  </a:tcPr>
+                </a:tc>
+                <a:tc>
+                  <a:txBody>
+                    <a:bodyPr/>
+                    <a:lstStyle/>
+                    <a:p>
+                      <a:pPr>
+                        <a:buNone/>
+                      </a:pPr>
+                      <a:r>
+                        <a:rPr lang="en-IN" dirty="0"/>
+                        <a:t>8</a:t>
+                      </a:r>
+                    </a:p>
+                  </a:txBody>
+                  <a:tcPr anchor="ctr">
+                    <a:lnL>
+                      <a:noFill/>
+                    </a:lnL>
+                    <a:lnR>
+                      <a:noFill/>
+                    </a:lnR>
+                    <a:lnT>
+                      <a:noFill/>
+                    </a:lnT>
+                    <a:lnB>
+                      <a:noFill/>
+                    </a:lnB>
+                    <a:noFill/>
+                  </a:tcPr>
+                </a:tc>
+                <a:extLst>
+                  <a:ext uri="{0D108BD9-81ED-4DB2-BD59-A6C34878D82A}">
+                    <a16:rowId xmlns:a16="http://schemas.microsoft.com/office/drawing/2014/main" val="2719708211"/>
+                  </a:ext>
+                </a:extLst>
+              </a:tr>
+            </a:tbl>
+          </a:graphicData>
+        </a:graphic>
+      </p:graphicFrame>
+      <p:sp>
+        <p:nvSpPr>
+          <p:cNvPr id="5" name="TextBox 4">
+            <a:extLst>
+              <a:ext uri="{FF2B5EF4-FFF2-40B4-BE49-F238E27FC236}">
+                <a16:creationId xmlns:a16="http://schemas.microsoft.com/office/drawing/2014/main" id="{61B86264-EFC8-2D3B-F575-198AD73A5373}"/>
+              </a:ext>
+            </a:extLst>
+          </p:cNvPr>
+          <p:cNvSpPr txBox="1"/>
+          <p:nvPr/>
+        </p:nvSpPr>
+        <p:spPr>
+          <a:xfrm>
+            <a:off x="481263" y="2623443"/>
+            <a:ext cx="6096000" cy="646331"/>
+          </a:xfrm>
+          <a:prstGeom prst="rect">
+            <a:avLst/>
+          </a:prstGeom>
+          <a:noFill/>
+        </p:spPr>
+        <p:txBody>
+          <a:bodyPr wrap="square">
+            <a:spAutoFit/>
+          </a:bodyPr>
+          <a:lstStyle/>
+          <a:p>
+            <a:pPr>
+              <a:buNone/>
+            </a:pPr>
+            <a:endParaRPr lang="en-IN" b="1" dirty="0"/>
+          </a:p>
+          <a:p>
+            <a:pPr>
+              <a:buNone/>
+            </a:pPr>
+            <a:r>
+              <a:rPr lang="en-IN" dirty="0"/>
+              <a:t>Student Marks Dataset:</a:t>
+            </a:r>
+          </a:p>
+        </p:txBody>
+      </p:sp>
+      <p:sp>
+        <p:nvSpPr>
+          <p:cNvPr id="6" name="TextBox 5">
+            <a:extLst>
+              <a:ext uri="{FF2B5EF4-FFF2-40B4-BE49-F238E27FC236}">
+                <a16:creationId xmlns:a16="http://schemas.microsoft.com/office/drawing/2014/main" id="{33C66A83-FCB1-0C88-6379-749F6F390C12}"/>
+              </a:ext>
+            </a:extLst>
+          </p:cNvPr>
+          <p:cNvSpPr txBox="1"/>
+          <p:nvPr/>
+        </p:nvSpPr>
+        <p:spPr>
+          <a:xfrm>
+            <a:off x="705853" y="5221523"/>
+            <a:ext cx="10635915" cy="369332"/>
+          </a:xfrm>
+          <a:prstGeom prst="rect">
+            <a:avLst/>
+          </a:prstGeom>
+          <a:noFill/>
+        </p:spPr>
+        <p:txBody>
+          <a:bodyPr wrap="square" rtlCol="0">
+            <a:spAutoFit/>
+          </a:bodyPr>
+          <a:lstStyle/>
+          <a:p>
+            <a:r>
+              <a:rPr lang="en-IN" dirty="0"/>
+              <a:t>The model learns the relationship between study hours and marks.</a:t>
+            </a:r>
+          </a:p>
+        </p:txBody>
+      </p:sp>
+    </p:spTree>
+    <p:extLst>
+      <p:ext uri="{BB962C8B-B14F-4D97-AF65-F5344CB8AC3E}">
+        <p14:creationId xmlns:p14="http://schemas.microsoft.com/office/powerpoint/2010/main" val="4150747843"/>
+      </p:ext>
+    </p:extLst>
+  </p:cSld>
+  <p:clrMapOvr>
+    <a:masterClrMapping/>
+  </p:clrMapOvr>
+</p:sld>
+</file>
+
+<file path=ppt/slides/slide6.xml><?xml version="1.0" encoding="utf-8"?>
+<p:sld xmlns:a="http://schemas.openxmlformats.org/drawingml/2006/main" xmlns:r="http://schemas.openxmlformats.org/officeDocument/2006/relationships" xmlns:p="http://schemas.openxmlformats.org/presentationml/2006/main">
+  <p:cSld>
+    <p:spTree>
+      <p:nvGrpSpPr>
+        <p:cNvPr id="1" name=""/>
+        <p:cNvGrpSpPr/>
+        <p:nvPr/>
+      </p:nvGrpSpPr>
+      <p:grpSpPr>
+        <a:xfrm>
+          <a:off x="0" y="0"/>
+          <a:ext cx="0" cy="0"/>
+          <a:chOff x="0" y="0"/>
+          <a:chExt cx="0" cy="0"/>
+        </a:xfrm>
+      </p:grpSpPr>
+      <p:sp>
+        <p:nvSpPr>
+          <p:cNvPr id="2" name="TextBox 1">
+            <a:extLst>
+              <a:ext uri="{FF2B5EF4-FFF2-40B4-BE49-F238E27FC236}">
+                <a16:creationId xmlns:a16="http://schemas.microsoft.com/office/drawing/2014/main" id="{D122BC1F-9B52-38FD-E408-B755092B3AC0}"/>
+              </a:ext>
+            </a:extLst>
+          </p:cNvPr>
+          <p:cNvSpPr txBox="1"/>
+          <p:nvPr/>
+        </p:nvSpPr>
+        <p:spPr>
+          <a:xfrm>
+            <a:off x="721895" y="705853"/>
+            <a:ext cx="10748210" cy="2308324"/>
+          </a:xfrm>
+          <a:prstGeom prst="rect">
+            <a:avLst/>
+          </a:prstGeom>
+          <a:noFill/>
+        </p:spPr>
+        <p:txBody>
+          <a:bodyPr wrap="square" rtlCol="0">
+            <a:spAutoFit/>
+          </a:bodyPr>
+          <a:lstStyle/>
+          <a:p>
+            <a:r>
+              <a:rPr lang="en-IN" dirty="0"/>
+              <a:t>Building Neural Networks</a:t>
+            </a:r>
+          </a:p>
+          <a:p>
+            <a:r>
+              <a:rPr lang="en-IN" dirty="0"/>
+              <a:t>Neural Networks are the foundation of modern AI systems.</a:t>
+            </a:r>
+          </a:p>
+          <a:p>
+            <a:r>
+              <a:rPr lang="en-IN" dirty="0"/>
+              <a:t>Building a neural network manually involves:</a:t>
+            </a:r>
+          </a:p>
+          <a:p>
+            <a:r>
+              <a:rPr lang="en-IN" dirty="0"/>
+              <a:t>Matrix multiplications </a:t>
+            </a:r>
+          </a:p>
+          <a:p>
+            <a:r>
+              <a:rPr lang="en-IN" dirty="0"/>
+              <a:t>Weight updates </a:t>
+            </a:r>
+          </a:p>
+          <a:p>
+            <a:r>
+              <a:rPr lang="en-IN" dirty="0"/>
+              <a:t>Backpropagation </a:t>
+            </a:r>
+          </a:p>
+          <a:p>
+            <a:r>
+              <a:rPr lang="en-IN" dirty="0"/>
+              <a:t>Gradient Descent</a:t>
+            </a:r>
+          </a:p>
+          <a:p>
+            <a:endParaRPr lang="en-IN" dirty="0"/>
+          </a:p>
+        </p:txBody>
+      </p:sp>
+    </p:spTree>
+    <p:extLst>
+      <p:ext uri="{BB962C8B-B14F-4D97-AF65-F5344CB8AC3E}">
+        <p14:creationId xmlns:p14="http://schemas.microsoft.com/office/powerpoint/2010/main" val="3052935257"/>
+      </p:ext>
+    </p:extLst>
+  </p:cSld>
+  <p:clrMapOvr>
+    <a:masterClrMapping/>
+  </p:clrMapOvr>
+</p:sld>
+</file>
+
+<file path=ppt/slides/slide7.xml><?xml version="1.0" encoding="utf-8"?>
+<p:sld xmlns:a="http://schemas.openxmlformats.org/drawingml/2006/main" xmlns:r="http://schemas.openxmlformats.org/officeDocument/2006/relationships" xmlns:p="http://schemas.openxmlformats.org/presentationml/2006/main">
+  <p:cSld>
+    <p:spTree>
+      <p:nvGrpSpPr>
+        <p:cNvPr id="1" name=""/>
+        <p:cNvGrpSpPr/>
+        <p:nvPr/>
+      </p:nvGrpSpPr>
+      <p:grpSpPr>
+        <a:xfrm>
+          <a:off x="0" y="0"/>
+          <a:ext cx="0" cy="0"/>
+          <a:chOff x="0" y="0"/>
+          <a:chExt cx="0" cy="0"/>
+        </a:xfrm>
+      </p:grpSpPr>
+      <p:sp>
+        <p:nvSpPr>
+          <p:cNvPr id="2" name="TextBox 1">
+            <a:extLst>
+              <a:ext uri="{FF2B5EF4-FFF2-40B4-BE49-F238E27FC236}">
+                <a16:creationId xmlns:a16="http://schemas.microsoft.com/office/drawing/2014/main" id="{4996C6E7-6A54-4037-FE9E-99DB34987532}"/>
+              </a:ext>
+            </a:extLst>
+          </p:cNvPr>
+          <p:cNvSpPr txBox="1"/>
+          <p:nvPr/>
+        </p:nvSpPr>
+        <p:spPr>
+          <a:xfrm>
+            <a:off x="449179" y="577516"/>
+            <a:ext cx="11245516" cy="3970318"/>
+          </a:xfrm>
+          <a:prstGeom prst="rect">
+            <a:avLst/>
+          </a:prstGeom>
+          <a:noFill/>
+        </p:spPr>
+        <p:txBody>
+          <a:bodyPr wrap="square" rtlCol="0">
+            <a:spAutoFit/>
+          </a:bodyPr>
+          <a:lstStyle/>
+          <a:p>
+            <a:r>
+              <a:rPr lang="en-IN" dirty="0"/>
+              <a:t>NumPy (Numerical Python)</a:t>
+            </a:r>
+          </a:p>
+          <a:p>
+            <a:r>
+              <a:rPr lang="en-IN" dirty="0"/>
+              <a:t>Used for numerical computing and mathematical operations.</a:t>
+            </a:r>
+          </a:p>
+          <a:p>
+            <a:r>
+              <a:rPr lang="en-IN" dirty="0"/>
+              <a:t>Ex:- </a:t>
+            </a:r>
+          </a:p>
+          <a:p>
+            <a:r>
+              <a:rPr lang="en-IN" dirty="0"/>
+              <a:t>Without NumPy:</a:t>
+            </a:r>
+          </a:p>
+          <a:p>
+            <a:r>
+              <a:rPr lang="en-US" dirty="0"/>
+              <a:t>     numbers = [1,2,3]</a:t>
+            </a:r>
+          </a:p>
+          <a:p>
+            <a:r>
+              <a:rPr lang="en-US" dirty="0"/>
+              <a:t>      result = []</a:t>
+            </a:r>
+          </a:p>
+          <a:p>
+            <a:r>
+              <a:rPr lang="en-US" dirty="0"/>
+              <a:t>      for num in numbers:</a:t>
+            </a:r>
+          </a:p>
+          <a:p>
+            <a:r>
+              <a:rPr lang="en-US" dirty="0"/>
+              <a:t>               </a:t>
+            </a:r>
+            <a:r>
+              <a:rPr lang="en-US" dirty="0" err="1"/>
+              <a:t>result.append</a:t>
+            </a:r>
+            <a:r>
+              <a:rPr lang="en-US" dirty="0"/>
+              <a:t>(num * 2)</a:t>
+            </a:r>
+          </a:p>
+          <a:p>
+            <a:r>
+              <a:rPr lang="en-US" dirty="0"/>
+              <a:t>      print(result)</a:t>
+            </a:r>
+          </a:p>
+          <a:p>
+            <a:endParaRPr lang="en-US" dirty="0"/>
+          </a:p>
+          <a:p>
+            <a:r>
+              <a:rPr lang="en-US" dirty="0"/>
+              <a:t>With NumPy: </a:t>
+            </a:r>
+            <a:endParaRPr lang="en-IN" dirty="0"/>
+          </a:p>
+          <a:p>
+            <a:r>
+              <a:rPr lang="en-US" dirty="0"/>
+              <a:t>                 import </a:t>
+            </a:r>
+            <a:r>
+              <a:rPr lang="en-US" dirty="0" err="1"/>
+              <a:t>numpy</a:t>
+            </a:r>
+            <a:r>
+              <a:rPr lang="en-US" dirty="0"/>
+              <a:t> as np</a:t>
+            </a:r>
+          </a:p>
+          <a:p>
+            <a:r>
+              <a:rPr lang="en-US" dirty="0"/>
+              <a:t>                 a = </a:t>
+            </a:r>
+            <a:r>
+              <a:rPr lang="en-US" dirty="0" err="1"/>
+              <a:t>np.array</a:t>
+            </a:r>
+            <a:r>
+              <a:rPr lang="en-US" dirty="0"/>
+              <a:t>([10, 20, 30, 40, 50])</a:t>
+            </a:r>
+          </a:p>
+          <a:p>
+            <a:r>
+              <a:rPr lang="en-US" dirty="0"/>
+              <a:t>                  print(a *2)</a:t>
+            </a:r>
+            <a:r>
+              <a:rPr lang="en-IN" dirty="0"/>
+              <a:t> </a:t>
+            </a:r>
+          </a:p>
+        </p:txBody>
+      </p:sp>
+    </p:spTree>
+    <p:extLst>
+      <p:ext uri="{BB962C8B-B14F-4D97-AF65-F5344CB8AC3E}">
+        <p14:creationId xmlns:p14="http://schemas.microsoft.com/office/powerpoint/2010/main" val="2751357019"/>
       </p:ext>
     </p:extLst>
   </p:cSld>

--- a/Python_Library.pptx
+++ b/Python_Library.pptx
@@ -12,6 +12,8 @@
     <p:sldId id="260" r:id="rId6"/>
     <p:sldId id="261" r:id="rId7"/>
     <p:sldId id="262" r:id="rId8"/>
+    <p:sldId id="264" r:id="rId9"/>
+    <p:sldId id="263" r:id="rId10"/>
   </p:sldIdLst>
   <p:sldSz cx="12192000" cy="6858000"/>
   <p:notesSz cx="6858000" cy="9144000"/>
@@ -275,7 +277,7 @@
           <a:p>
             <a:fld id="{1E29E131-89F4-4BF3-B8CF-85E9E906BC4C}" type="datetimeFigureOut">
               <a:rPr lang="en-IN" smtClean="0"/>
-              <a:t>12-07-2026</a:t>
+              <a:t>13-07-2026</a:t>
             </a:fld>
             <a:endParaRPr lang="en-IN"/>
           </a:p>
@@ -475,7 +477,7 @@
           <a:p>
             <a:fld id="{1E29E131-89F4-4BF3-B8CF-85E9E906BC4C}" type="datetimeFigureOut">
               <a:rPr lang="en-IN" smtClean="0"/>
-              <a:t>12-07-2026</a:t>
+              <a:t>13-07-2026</a:t>
             </a:fld>
             <a:endParaRPr lang="en-IN"/>
           </a:p>
@@ -685,7 +687,7 @@
           <a:p>
             <a:fld id="{1E29E131-89F4-4BF3-B8CF-85E9E906BC4C}" type="datetimeFigureOut">
               <a:rPr lang="en-IN" smtClean="0"/>
-              <a:t>12-07-2026</a:t>
+              <a:t>13-07-2026</a:t>
             </a:fld>
             <a:endParaRPr lang="en-IN"/>
           </a:p>
@@ -885,7 +887,7 @@
           <a:p>
             <a:fld id="{1E29E131-89F4-4BF3-B8CF-85E9E906BC4C}" type="datetimeFigureOut">
               <a:rPr lang="en-IN" smtClean="0"/>
-              <a:t>12-07-2026</a:t>
+              <a:t>13-07-2026</a:t>
             </a:fld>
             <a:endParaRPr lang="en-IN"/>
           </a:p>
@@ -1161,7 +1163,7 @@
           <a:p>
             <a:fld id="{1E29E131-89F4-4BF3-B8CF-85E9E906BC4C}" type="datetimeFigureOut">
               <a:rPr lang="en-IN" smtClean="0"/>
-              <a:t>12-07-2026</a:t>
+              <a:t>13-07-2026</a:t>
             </a:fld>
             <a:endParaRPr lang="en-IN"/>
           </a:p>
@@ -1429,7 +1431,7 @@
           <a:p>
             <a:fld id="{1E29E131-89F4-4BF3-B8CF-85E9E906BC4C}" type="datetimeFigureOut">
               <a:rPr lang="en-IN" smtClean="0"/>
-              <a:t>12-07-2026</a:t>
+              <a:t>13-07-2026</a:t>
             </a:fld>
             <a:endParaRPr lang="en-IN"/>
           </a:p>
@@ -1844,7 +1846,7 @@
           <a:p>
             <a:fld id="{1E29E131-89F4-4BF3-B8CF-85E9E906BC4C}" type="datetimeFigureOut">
               <a:rPr lang="en-IN" smtClean="0"/>
-              <a:t>12-07-2026</a:t>
+              <a:t>13-07-2026</a:t>
             </a:fld>
             <a:endParaRPr lang="en-IN"/>
           </a:p>
@@ -1986,7 +1988,7 @@
           <a:p>
             <a:fld id="{1E29E131-89F4-4BF3-B8CF-85E9E906BC4C}" type="datetimeFigureOut">
               <a:rPr lang="en-IN" smtClean="0"/>
-              <a:t>12-07-2026</a:t>
+              <a:t>13-07-2026</a:t>
             </a:fld>
             <a:endParaRPr lang="en-IN"/>
           </a:p>
@@ -2099,7 +2101,7 @@
           <a:p>
             <a:fld id="{1E29E131-89F4-4BF3-B8CF-85E9E906BC4C}" type="datetimeFigureOut">
               <a:rPr lang="en-IN" smtClean="0"/>
-              <a:t>12-07-2026</a:t>
+              <a:t>13-07-2026</a:t>
             </a:fld>
             <a:endParaRPr lang="en-IN"/>
           </a:p>
@@ -2412,7 +2414,7 @@
           <a:p>
             <a:fld id="{1E29E131-89F4-4BF3-B8CF-85E9E906BC4C}" type="datetimeFigureOut">
               <a:rPr lang="en-IN" smtClean="0"/>
-              <a:t>12-07-2026</a:t>
+              <a:t>13-07-2026</a:t>
             </a:fld>
             <a:endParaRPr lang="en-IN"/>
           </a:p>
@@ -2701,7 +2703,7 @@
           <a:p>
             <a:fld id="{1E29E131-89F4-4BF3-B8CF-85E9E906BC4C}" type="datetimeFigureOut">
               <a:rPr lang="en-IN" smtClean="0"/>
-              <a:t>12-07-2026</a:t>
+              <a:t>13-07-2026</a:t>
             </a:fld>
             <a:endParaRPr lang="en-IN"/>
           </a:p>
@@ -2944,7 +2946,7 @@
           <a:p>
             <a:fld id="{1E29E131-89F4-4BF3-B8CF-85E9E906BC4C}" type="datetimeFigureOut">
               <a:rPr lang="en-IN" smtClean="0"/>
-              <a:t>12-07-2026</a:t>
+              <a:t>13-07-2026</a:t>
             </a:fld>
             <a:endParaRPr lang="en-IN"/>
           </a:p>
@@ -3753,8 +3755,8 @@
         </p:nvSpPr>
         <p:spPr>
           <a:xfrm>
-            <a:off x="413657" y="435429"/>
-            <a:ext cx="11342914" cy="6740307"/>
+            <a:off x="424543" y="315686"/>
+            <a:ext cx="11342914" cy="6463308"/>
           </a:xfrm>
           <a:prstGeom prst="rect">
             <a:avLst/>
@@ -3769,7 +3771,11 @@
           <a:p>
             <a:r>
               <a:rPr lang="en-IN" dirty="0"/>
-              <a:t>                                                               Why Do AI Developers Use Libraries?</a:t>
+              <a:t>                                                               </a:t>
+            </a:r>
+            <a:r>
+              <a:rPr lang="en-IN" b="1" dirty="0"/>
+              <a:t>Why Do AI Developers Use Libraries?</a:t>
             </a:r>
           </a:p>
           <a:p>
@@ -3779,24 +3785,40 @@
             </a:r>
           </a:p>
           <a:p>
+            <a:pPr marL="285750" indent="-285750">
+              <a:buFont typeface="Arial" panose="020B0604020202020204" pitchFamily="34" charset="0"/>
+              <a:buChar char="•"/>
+            </a:pPr>
             <a:r>
               <a:rPr lang="en-IN" dirty="0"/>
               <a:t>Processing Large Data</a:t>
             </a:r>
           </a:p>
           <a:p>
+            <a:pPr marL="285750" indent="-285750">
+              <a:buFont typeface="Arial" panose="020B0604020202020204" pitchFamily="34" charset="0"/>
+              <a:buChar char="•"/>
+            </a:pPr>
             <a:r>
               <a:rPr lang="en-IN" dirty="0"/>
               <a:t>Mathematical Calculations</a:t>
             </a:r>
           </a:p>
           <a:p>
+            <a:pPr marL="285750" indent="-285750">
+              <a:buFont typeface="Arial" panose="020B0604020202020204" pitchFamily="34" charset="0"/>
+              <a:buChar char="•"/>
+            </a:pPr>
             <a:r>
               <a:rPr lang="en-IN" dirty="0"/>
               <a:t>Neural Networks</a:t>
             </a:r>
           </a:p>
           <a:p>
+            <a:pPr marL="285750" indent="-285750">
+              <a:buFont typeface="Arial" panose="020B0604020202020204" pitchFamily="34" charset="0"/>
+              <a:buChar char="•"/>
+            </a:pPr>
             <a:r>
               <a:rPr lang="en-IN" dirty="0"/>
               <a:t>Visualization</a:t>
@@ -3807,7 +3829,7 @@
           </a:p>
           <a:p>
             <a:r>
-              <a:rPr lang="en-IN" dirty="0"/>
+              <a:rPr lang="en-IN" b="1" dirty="0"/>
               <a:t>Processing Large Data:</a:t>
             </a:r>
           </a:p>
@@ -3848,7 +3870,7 @@
           </a:p>
           <a:p>
             <a:r>
-              <a:rPr lang="en-IN" dirty="0"/>
+              <a:rPr lang="en-IN" b="1" dirty="0"/>
               <a:t>Performing Complex Mathematical Calculations:</a:t>
             </a:r>
           </a:p>
@@ -3875,12 +3897,9 @@
             </a:r>
           </a:p>
           <a:p>
-            <a:endParaRPr lang="pt-BR" dirty="0"/>
-          </a:p>
-          <a:p>
-            <a:r>
-              <a:rPr lang="pt-BR" dirty="0"/>
-              <a:t>Using Libraries</a:t>
+            <a:r>
+              <a:rPr lang="pt-BR" b="1" dirty="0"/>
+              <a:t>Using Libraries:</a:t>
             </a:r>
           </a:p>
           <a:p>
@@ -3996,7 +4015,7 @@
           <a:lstStyle/>
           <a:p>
             <a:r>
-              <a:rPr lang="en-IN" dirty="0"/>
+              <a:rPr lang="en-IN" b="1" dirty="0"/>
               <a:t>Training Machine Learning Models</a:t>
             </a:r>
           </a:p>
@@ -4489,7 +4508,7 @@
           <a:lstStyle/>
           <a:p>
             <a:r>
-              <a:rPr lang="en-IN" dirty="0"/>
+              <a:rPr lang="en-IN" b="1" dirty="0"/>
               <a:t>Building Neural Networks</a:t>
             </a:r>
           </a:p>
@@ -4578,8 +4597,8 @@
         </p:nvSpPr>
         <p:spPr>
           <a:xfrm>
-            <a:off x="449179" y="577516"/>
-            <a:ext cx="11245516" cy="3970318"/>
+            <a:off x="558036" y="719030"/>
+            <a:ext cx="11245516" cy="4616648"/>
           </a:xfrm>
           <a:prstGeom prst="rect">
             <a:avLst/>
@@ -4593,8 +4612,21 @@
           <a:lstStyle/>
           <a:p>
             <a:r>
-              <a:rPr lang="en-IN" dirty="0"/>
-              <a:t>NumPy (Numerical Python)</a:t>
+              <a:rPr lang="en-IN" b="1" dirty="0"/>
+              <a:t>                                                                        </a:t>
+            </a:r>
+            <a:r>
+              <a:rPr lang="en-IN" sz="2400" b="1" dirty="0"/>
+              <a:t>Different Libraries</a:t>
+            </a:r>
+          </a:p>
+          <a:p>
+            <a:endParaRPr lang="en-IN" b="1" dirty="0"/>
+          </a:p>
+          <a:p>
+            <a:r>
+              <a:rPr lang="en-IN" b="1" dirty="0"/>
+              <a:t>NumPy (Numerical Python):</a:t>
             </a:r>
           </a:p>
           <a:p>
@@ -4707,6 +4739,937 @@
     <p:extLst>
       <p:ext uri="{BB962C8B-B14F-4D97-AF65-F5344CB8AC3E}">
         <p14:creationId xmlns:p14="http://schemas.microsoft.com/office/powerpoint/2010/main" val="2751357019"/>
+      </p:ext>
+    </p:extLst>
+  </p:cSld>
+  <p:clrMapOvr>
+    <a:masterClrMapping/>
+  </p:clrMapOvr>
+</p:sld>
+</file>
+
+<file path=ppt/slides/slide8.xml><?xml version="1.0" encoding="utf-8"?>
+<p:sld xmlns:a="http://schemas.openxmlformats.org/drawingml/2006/main" xmlns:r="http://schemas.openxmlformats.org/officeDocument/2006/relationships" xmlns:p="http://schemas.openxmlformats.org/presentationml/2006/main">
+  <p:cSld>
+    <p:spTree>
+      <p:nvGrpSpPr>
+        <p:cNvPr id="1" name=""/>
+        <p:cNvGrpSpPr/>
+        <p:nvPr/>
+      </p:nvGrpSpPr>
+      <p:grpSpPr>
+        <a:xfrm>
+          <a:off x="0" y="0"/>
+          <a:ext cx="0" cy="0"/>
+          <a:chOff x="0" y="0"/>
+          <a:chExt cx="0" cy="0"/>
+        </a:xfrm>
+      </p:grpSpPr>
+      <p:graphicFrame>
+        <p:nvGraphicFramePr>
+          <p:cNvPr id="3" name="Table 2">
+            <a:extLst>
+              <a:ext uri="{FF2B5EF4-FFF2-40B4-BE49-F238E27FC236}">
+                <a16:creationId xmlns:a16="http://schemas.microsoft.com/office/drawing/2014/main" id="{0ACC5ED3-00E8-4893-0B44-07C18C5BB7E4}"/>
+              </a:ext>
+            </a:extLst>
+          </p:cNvPr>
+          <p:cNvGraphicFramePr>
+            <a:graphicFrameLocks noGrp="1"/>
+          </p:cNvGraphicFramePr>
+          <p:nvPr>
+            <p:extLst>
+              <p:ext uri="{D42A27DB-BD31-4B8C-83A1-F6EECF244321}">
+                <p14:modId xmlns:p14="http://schemas.microsoft.com/office/powerpoint/2010/main" val="1156911963"/>
+              </p:ext>
+            </p:extLst>
+          </p:nvPr>
+        </p:nvGraphicFramePr>
+        <p:xfrm>
+          <a:off x="838200" y="1645920"/>
+          <a:ext cx="10515600" cy="3566160"/>
+        </p:xfrm>
+        <a:graphic>
+          <a:graphicData uri="http://schemas.openxmlformats.org/drawingml/2006/table">
+            <a:tbl>
+              <a:tblPr/>
+              <a:tblGrid>
+                <a:gridCol w="5257800">
+                  <a:extLst>
+                    <a:ext uri="{9D8B030D-6E8A-4147-A177-3AD203B41FA5}">
+                      <a16:colId xmlns:a16="http://schemas.microsoft.com/office/drawing/2014/main" val="80566225"/>
+                    </a:ext>
+                  </a:extLst>
+                </a:gridCol>
+                <a:gridCol w="5257800">
+                  <a:extLst>
+                    <a:ext uri="{9D8B030D-6E8A-4147-A177-3AD203B41FA5}">
+                      <a16:colId xmlns:a16="http://schemas.microsoft.com/office/drawing/2014/main" val="504170504"/>
+                    </a:ext>
+                  </a:extLst>
+                </a:gridCol>
+              </a:tblGrid>
+              <a:tr h="0">
+                <a:tc>
+                  <a:txBody>
+                    <a:bodyPr/>
+                    <a:lstStyle/>
+                    <a:p>
+                      <a:pPr>
+                        <a:buNone/>
+                      </a:pPr>
+                      <a:r>
+                        <a:rPr lang="en-IN" sz="2000" b="1" dirty="0"/>
+                        <a:t>Category</a:t>
+                      </a:r>
+                    </a:p>
+                  </a:txBody>
+                  <a:tcPr anchor="ctr">
+                    <a:lnL>
+                      <a:noFill/>
+                    </a:lnL>
+                    <a:lnR>
+                      <a:noFill/>
+                    </a:lnR>
+                    <a:lnT>
+                      <a:noFill/>
+                    </a:lnT>
+                    <a:lnB>
+                      <a:noFill/>
+                    </a:lnB>
+                    <a:noFill/>
+                  </a:tcPr>
+                </a:tc>
+                <a:tc>
+                  <a:txBody>
+                    <a:bodyPr/>
+                    <a:lstStyle/>
+                    <a:p>
+                      <a:pPr>
+                        <a:buNone/>
+                      </a:pPr>
+                      <a:r>
+                        <a:rPr lang="en-IN" sz="2000" b="1" dirty="0"/>
+                        <a:t>Methods</a:t>
+                      </a:r>
+                    </a:p>
+                  </a:txBody>
+                  <a:tcPr anchor="ctr">
+                    <a:lnL>
+                      <a:noFill/>
+                    </a:lnL>
+                    <a:lnR>
+                      <a:noFill/>
+                    </a:lnR>
+                    <a:lnT>
+                      <a:noFill/>
+                    </a:lnT>
+                    <a:lnB>
+                      <a:noFill/>
+                    </a:lnB>
+                    <a:noFill/>
+                  </a:tcPr>
+                </a:tc>
+                <a:extLst>
+                  <a:ext uri="{0D108BD9-81ED-4DB2-BD59-A6C34878D82A}">
+                    <a16:rowId xmlns:a16="http://schemas.microsoft.com/office/drawing/2014/main" val="1274504301"/>
+                  </a:ext>
+                </a:extLst>
+              </a:tr>
+              <a:tr h="0">
+                <a:tc>
+                  <a:txBody>
+                    <a:bodyPr/>
+                    <a:lstStyle/>
+                    <a:p>
+                      <a:pPr>
+                        <a:buNone/>
+                      </a:pPr>
+                      <a:r>
+                        <a:rPr lang="en-IN" sz="2000" dirty="0"/>
+                        <a:t>Array Creation                               </a:t>
+                      </a:r>
+                      <a:r>
+                        <a:rPr lang="en-IN" sz="2000" dirty="0">
+                          <a:sym typeface="Wingdings" panose="05000000000000000000" pitchFamily="2" charset="2"/>
+                        </a:rPr>
+                        <a:t></a:t>
+                      </a:r>
+                      <a:endParaRPr lang="en-IN" sz="2000" dirty="0"/>
+                    </a:p>
+                  </a:txBody>
+                  <a:tcPr anchor="ctr">
+                    <a:lnL>
+                      <a:noFill/>
+                    </a:lnL>
+                    <a:lnR>
+                      <a:noFill/>
+                    </a:lnR>
+                    <a:lnT>
+                      <a:noFill/>
+                    </a:lnT>
+                    <a:lnB>
+                      <a:noFill/>
+                    </a:lnB>
+                    <a:noFill/>
+                  </a:tcPr>
+                </a:tc>
+                <a:tc>
+                  <a:txBody>
+                    <a:bodyPr/>
+                    <a:lstStyle/>
+                    <a:p>
+                      <a:pPr>
+                        <a:buNone/>
+                      </a:pPr>
+                      <a:r>
+                        <a:rPr lang="en-IN" sz="2000" dirty="0">
+                          <a:latin typeface="Courier New" panose="02070309020205020404" pitchFamily="49" charset="0"/>
+                        </a:rPr>
+                        <a:t>array()</a:t>
+                      </a:r>
+                      <a:r>
+                        <a:rPr lang="en-IN" sz="2000" dirty="0"/>
+                        <a:t>, </a:t>
+                      </a:r>
+                      <a:r>
+                        <a:rPr lang="en-IN" sz="2000" dirty="0">
+                          <a:latin typeface="Courier New" panose="02070309020205020404" pitchFamily="49" charset="0"/>
+                        </a:rPr>
+                        <a:t>zeros()</a:t>
+                      </a:r>
+                      <a:r>
+                        <a:rPr lang="en-IN" sz="2000" dirty="0"/>
+                        <a:t>, </a:t>
+                      </a:r>
+                      <a:r>
+                        <a:rPr lang="en-IN" sz="2000" dirty="0">
+                          <a:latin typeface="Courier New" panose="02070309020205020404" pitchFamily="49" charset="0"/>
+                        </a:rPr>
+                        <a:t>ones()</a:t>
+                      </a:r>
+                      <a:r>
+                        <a:rPr lang="en-IN" sz="2000" dirty="0"/>
+                        <a:t>, </a:t>
+                      </a:r>
+                      <a:r>
+                        <a:rPr lang="en-IN" sz="2000" dirty="0" err="1">
+                          <a:latin typeface="Courier New" panose="02070309020205020404" pitchFamily="49" charset="0"/>
+                        </a:rPr>
+                        <a:t>arange</a:t>
+                      </a:r>
+                      <a:r>
+                        <a:rPr lang="en-IN" sz="2000" dirty="0">
+                          <a:latin typeface="Courier New" panose="02070309020205020404" pitchFamily="49" charset="0"/>
+                        </a:rPr>
+                        <a:t>()</a:t>
+                      </a:r>
+                      <a:endParaRPr lang="en-IN" sz="2000" dirty="0"/>
+                    </a:p>
+                  </a:txBody>
+                  <a:tcPr anchor="ctr">
+                    <a:lnL>
+                      <a:noFill/>
+                    </a:lnL>
+                    <a:lnR>
+                      <a:noFill/>
+                    </a:lnR>
+                    <a:lnT>
+                      <a:noFill/>
+                    </a:lnT>
+                    <a:lnB>
+                      <a:noFill/>
+                    </a:lnB>
+                    <a:noFill/>
+                  </a:tcPr>
+                </a:tc>
+                <a:extLst>
+                  <a:ext uri="{0D108BD9-81ED-4DB2-BD59-A6C34878D82A}">
+                    <a16:rowId xmlns:a16="http://schemas.microsoft.com/office/drawing/2014/main" val="157471161"/>
+                  </a:ext>
+                </a:extLst>
+              </a:tr>
+              <a:tr h="0">
+                <a:tc>
+                  <a:txBody>
+                    <a:bodyPr/>
+                    <a:lstStyle/>
+                    <a:p>
+                      <a:pPr>
+                        <a:buNone/>
+                      </a:pPr>
+                      <a:r>
+                        <a:rPr lang="en-IN" sz="2000" dirty="0"/>
+                        <a:t>Math                                                  </a:t>
+                      </a:r>
+                      <a:r>
+                        <a:rPr lang="en-IN" sz="2000" dirty="0">
+                          <a:sym typeface="Wingdings" panose="05000000000000000000" pitchFamily="2" charset="2"/>
+                        </a:rPr>
+                        <a:t></a:t>
+                      </a:r>
+                      <a:endParaRPr lang="en-IN" sz="2000" dirty="0"/>
+                    </a:p>
+                  </a:txBody>
+                  <a:tcPr anchor="ctr">
+                    <a:lnL>
+                      <a:noFill/>
+                    </a:lnL>
+                    <a:lnR>
+                      <a:noFill/>
+                    </a:lnR>
+                    <a:lnT>
+                      <a:noFill/>
+                    </a:lnT>
+                    <a:lnB>
+                      <a:noFill/>
+                    </a:lnB>
+                    <a:noFill/>
+                  </a:tcPr>
+                </a:tc>
+                <a:tc>
+                  <a:txBody>
+                    <a:bodyPr/>
+                    <a:lstStyle/>
+                    <a:p>
+                      <a:pPr>
+                        <a:buNone/>
+                      </a:pPr>
+                      <a:r>
+                        <a:rPr lang="en-IN" sz="2000">
+                          <a:latin typeface="Courier New" panose="02070309020205020404" pitchFamily="49" charset="0"/>
+                        </a:rPr>
+                        <a:t>sum()</a:t>
+                      </a:r>
+                      <a:r>
+                        <a:rPr lang="en-IN" sz="2000"/>
+                        <a:t>, </a:t>
+                      </a:r>
+                      <a:r>
+                        <a:rPr lang="en-IN" sz="2000">
+                          <a:latin typeface="Courier New" panose="02070309020205020404" pitchFamily="49" charset="0"/>
+                        </a:rPr>
+                        <a:t>mean()</a:t>
+                      </a:r>
+                      <a:r>
+                        <a:rPr lang="en-IN" sz="2000"/>
+                        <a:t>, </a:t>
+                      </a:r>
+                      <a:r>
+                        <a:rPr lang="en-IN" sz="2000">
+                          <a:latin typeface="Courier New" panose="02070309020205020404" pitchFamily="49" charset="0"/>
+                        </a:rPr>
+                        <a:t>max()</a:t>
+                      </a:r>
+                      <a:r>
+                        <a:rPr lang="en-IN" sz="2000"/>
+                        <a:t>, </a:t>
+                      </a:r>
+                      <a:r>
+                        <a:rPr lang="en-IN" sz="2000">
+                          <a:latin typeface="Courier New" panose="02070309020205020404" pitchFamily="49" charset="0"/>
+                        </a:rPr>
+                        <a:t>min()</a:t>
+                      </a:r>
+                      <a:r>
+                        <a:rPr lang="en-IN" sz="2000"/>
+                        <a:t>, </a:t>
+                      </a:r>
+                      <a:r>
+                        <a:rPr lang="en-IN" sz="2000">
+                          <a:latin typeface="Courier New" panose="02070309020205020404" pitchFamily="49" charset="0"/>
+                        </a:rPr>
+                        <a:t>std()</a:t>
+                      </a:r>
+                      <a:endParaRPr lang="en-IN" sz="2000"/>
+                    </a:p>
+                  </a:txBody>
+                  <a:tcPr anchor="ctr">
+                    <a:lnL>
+                      <a:noFill/>
+                    </a:lnL>
+                    <a:lnR>
+                      <a:noFill/>
+                    </a:lnR>
+                    <a:lnT>
+                      <a:noFill/>
+                    </a:lnT>
+                    <a:lnB>
+                      <a:noFill/>
+                    </a:lnB>
+                    <a:noFill/>
+                  </a:tcPr>
+                </a:tc>
+                <a:extLst>
+                  <a:ext uri="{0D108BD9-81ED-4DB2-BD59-A6C34878D82A}">
+                    <a16:rowId xmlns:a16="http://schemas.microsoft.com/office/drawing/2014/main" val="3321383831"/>
+                  </a:ext>
+                </a:extLst>
+              </a:tr>
+              <a:tr h="0">
+                <a:tc>
+                  <a:txBody>
+                    <a:bodyPr/>
+                    <a:lstStyle/>
+                    <a:p>
+                      <a:pPr>
+                        <a:buNone/>
+                      </a:pPr>
+                      <a:r>
+                        <a:rPr lang="en-IN" sz="2000" dirty="0"/>
+                        <a:t>Shape                                              </a:t>
+                      </a:r>
+                      <a:r>
+                        <a:rPr lang="en-IN" sz="2000" dirty="0">
+                          <a:sym typeface="Wingdings" panose="05000000000000000000" pitchFamily="2" charset="2"/>
+                        </a:rPr>
+                        <a:t></a:t>
+                      </a:r>
+                      <a:endParaRPr lang="en-IN" sz="2000" dirty="0"/>
+                    </a:p>
+                  </a:txBody>
+                  <a:tcPr anchor="ctr">
+                    <a:lnL>
+                      <a:noFill/>
+                    </a:lnL>
+                    <a:lnR>
+                      <a:noFill/>
+                    </a:lnR>
+                    <a:lnT>
+                      <a:noFill/>
+                    </a:lnT>
+                    <a:lnB>
+                      <a:noFill/>
+                    </a:lnB>
+                    <a:noFill/>
+                  </a:tcPr>
+                </a:tc>
+                <a:tc>
+                  <a:txBody>
+                    <a:bodyPr/>
+                    <a:lstStyle/>
+                    <a:p>
+                      <a:pPr>
+                        <a:buNone/>
+                      </a:pPr>
+                      <a:r>
+                        <a:rPr lang="en-IN" sz="2000">
+                          <a:latin typeface="Courier New" panose="02070309020205020404" pitchFamily="49" charset="0"/>
+                        </a:rPr>
+                        <a:t>shape</a:t>
+                      </a:r>
+                      <a:r>
+                        <a:rPr lang="en-IN" sz="2000"/>
+                        <a:t>, </a:t>
+                      </a:r>
+                      <a:r>
+                        <a:rPr lang="en-IN" sz="2000">
+                          <a:latin typeface="Courier New" panose="02070309020205020404" pitchFamily="49" charset="0"/>
+                        </a:rPr>
+                        <a:t>ndim</a:t>
+                      </a:r>
+                      <a:r>
+                        <a:rPr lang="en-IN" sz="2000"/>
+                        <a:t>, </a:t>
+                      </a:r>
+                      <a:r>
+                        <a:rPr lang="en-IN" sz="2000">
+                          <a:latin typeface="Courier New" panose="02070309020205020404" pitchFamily="49" charset="0"/>
+                        </a:rPr>
+                        <a:t>size</a:t>
+                      </a:r>
+                      <a:endParaRPr lang="en-IN" sz="2000"/>
+                    </a:p>
+                  </a:txBody>
+                  <a:tcPr anchor="ctr">
+                    <a:lnL>
+                      <a:noFill/>
+                    </a:lnL>
+                    <a:lnR>
+                      <a:noFill/>
+                    </a:lnR>
+                    <a:lnT>
+                      <a:noFill/>
+                    </a:lnT>
+                    <a:lnB>
+                      <a:noFill/>
+                    </a:lnB>
+                    <a:noFill/>
+                  </a:tcPr>
+                </a:tc>
+                <a:extLst>
+                  <a:ext uri="{0D108BD9-81ED-4DB2-BD59-A6C34878D82A}">
+                    <a16:rowId xmlns:a16="http://schemas.microsoft.com/office/drawing/2014/main" val="1502620742"/>
+                  </a:ext>
+                </a:extLst>
+              </a:tr>
+              <a:tr h="0">
+                <a:tc>
+                  <a:txBody>
+                    <a:bodyPr/>
+                    <a:lstStyle/>
+                    <a:p>
+                      <a:pPr>
+                        <a:buNone/>
+                      </a:pPr>
+                      <a:endParaRPr lang="en-IN" sz="2000" dirty="0"/>
+                    </a:p>
+                  </a:txBody>
+                  <a:tcPr anchor="ctr">
+                    <a:lnL>
+                      <a:noFill/>
+                    </a:lnL>
+                    <a:lnR>
+                      <a:noFill/>
+                    </a:lnR>
+                    <a:lnT>
+                      <a:noFill/>
+                    </a:lnT>
+                    <a:lnB>
+                      <a:noFill/>
+                    </a:lnB>
+                    <a:noFill/>
+                  </a:tcPr>
+                </a:tc>
+                <a:tc>
+                  <a:txBody>
+                    <a:bodyPr/>
+                    <a:lstStyle/>
+                    <a:p>
+                      <a:pPr>
+                        <a:buNone/>
+                      </a:pPr>
+                      <a:endParaRPr lang="en-IN" sz="2000" dirty="0"/>
+                    </a:p>
+                  </a:txBody>
+                  <a:tcPr anchor="ctr">
+                    <a:lnL>
+                      <a:noFill/>
+                    </a:lnL>
+                    <a:lnR>
+                      <a:noFill/>
+                    </a:lnR>
+                    <a:lnT>
+                      <a:noFill/>
+                    </a:lnT>
+                    <a:lnB>
+                      <a:noFill/>
+                    </a:lnB>
+                    <a:noFill/>
+                  </a:tcPr>
+                </a:tc>
+                <a:extLst>
+                  <a:ext uri="{0D108BD9-81ED-4DB2-BD59-A6C34878D82A}">
+                    <a16:rowId xmlns:a16="http://schemas.microsoft.com/office/drawing/2014/main" val="1790947994"/>
+                  </a:ext>
+                </a:extLst>
+              </a:tr>
+              <a:tr h="0">
+                <a:tc>
+                  <a:txBody>
+                    <a:bodyPr/>
+                    <a:lstStyle/>
+                    <a:p>
+                      <a:pPr>
+                        <a:buNone/>
+                      </a:pPr>
+                      <a:r>
+                        <a:rPr lang="en-IN" sz="2000" dirty="0"/>
+                        <a:t>Matrix                                              </a:t>
+                      </a:r>
+                      <a:r>
+                        <a:rPr lang="en-IN" sz="2000" dirty="0">
+                          <a:sym typeface="Wingdings" panose="05000000000000000000" pitchFamily="2" charset="2"/>
+                        </a:rPr>
+                        <a:t></a:t>
+                      </a:r>
+                      <a:endParaRPr lang="en-IN" sz="2000" dirty="0"/>
+                    </a:p>
+                  </a:txBody>
+                  <a:tcPr anchor="ctr">
+                    <a:lnL>
+                      <a:noFill/>
+                    </a:lnL>
+                    <a:lnR>
+                      <a:noFill/>
+                    </a:lnR>
+                    <a:lnT>
+                      <a:noFill/>
+                    </a:lnT>
+                    <a:lnB>
+                      <a:noFill/>
+                    </a:lnB>
+                    <a:noFill/>
+                  </a:tcPr>
+                </a:tc>
+                <a:tc>
+                  <a:txBody>
+                    <a:bodyPr/>
+                    <a:lstStyle/>
+                    <a:p>
+                      <a:pPr>
+                        <a:buNone/>
+                      </a:pPr>
+                      <a:r>
+                        <a:rPr lang="en-IN" sz="2000">
+                          <a:latin typeface="Courier New" panose="02070309020205020404" pitchFamily="49" charset="0"/>
+                        </a:rPr>
+                        <a:t>dot()</a:t>
+                      </a:r>
+                      <a:r>
+                        <a:rPr lang="en-IN" sz="2000"/>
+                        <a:t>, </a:t>
+                      </a:r>
+                      <a:r>
+                        <a:rPr lang="en-IN" sz="2000">
+                          <a:latin typeface="Courier New" panose="02070309020205020404" pitchFamily="49" charset="0"/>
+                        </a:rPr>
+                        <a:t>matmul()</a:t>
+                      </a:r>
+                      <a:endParaRPr lang="en-IN" sz="2000"/>
+                    </a:p>
+                  </a:txBody>
+                  <a:tcPr anchor="ctr">
+                    <a:lnL>
+                      <a:noFill/>
+                    </a:lnL>
+                    <a:lnR>
+                      <a:noFill/>
+                    </a:lnR>
+                    <a:lnT>
+                      <a:noFill/>
+                    </a:lnT>
+                    <a:lnB>
+                      <a:noFill/>
+                    </a:lnB>
+                    <a:noFill/>
+                  </a:tcPr>
+                </a:tc>
+                <a:extLst>
+                  <a:ext uri="{0D108BD9-81ED-4DB2-BD59-A6C34878D82A}">
+                    <a16:rowId xmlns:a16="http://schemas.microsoft.com/office/drawing/2014/main" val="1265478247"/>
+                  </a:ext>
+                </a:extLst>
+              </a:tr>
+              <a:tr h="0">
+                <a:tc>
+                  <a:txBody>
+                    <a:bodyPr/>
+                    <a:lstStyle/>
+                    <a:p>
+                      <a:pPr>
+                        <a:buNone/>
+                      </a:pPr>
+                      <a:endParaRPr lang="en-IN" sz="2000" dirty="0"/>
+                    </a:p>
+                  </a:txBody>
+                  <a:tcPr anchor="ctr">
+                    <a:lnL>
+                      <a:noFill/>
+                    </a:lnL>
+                    <a:lnR>
+                      <a:noFill/>
+                    </a:lnR>
+                    <a:lnT>
+                      <a:noFill/>
+                    </a:lnT>
+                    <a:lnB>
+                      <a:noFill/>
+                    </a:lnB>
+                    <a:noFill/>
+                  </a:tcPr>
+                </a:tc>
+                <a:tc>
+                  <a:txBody>
+                    <a:bodyPr/>
+                    <a:lstStyle/>
+                    <a:p>
+                      <a:pPr>
+                        <a:buNone/>
+                      </a:pPr>
+                      <a:endParaRPr lang="en-IN" sz="2000" dirty="0"/>
+                    </a:p>
+                  </a:txBody>
+                  <a:tcPr anchor="ctr">
+                    <a:lnL>
+                      <a:noFill/>
+                    </a:lnL>
+                    <a:lnR>
+                      <a:noFill/>
+                    </a:lnR>
+                    <a:lnT>
+                      <a:noFill/>
+                    </a:lnT>
+                    <a:lnB>
+                      <a:noFill/>
+                    </a:lnB>
+                    <a:noFill/>
+                  </a:tcPr>
+                </a:tc>
+                <a:extLst>
+                  <a:ext uri="{0D108BD9-81ED-4DB2-BD59-A6C34878D82A}">
+                    <a16:rowId xmlns:a16="http://schemas.microsoft.com/office/drawing/2014/main" val="1585138574"/>
+                  </a:ext>
+                </a:extLst>
+              </a:tr>
+              <a:tr h="0">
+                <a:tc>
+                  <a:txBody>
+                    <a:bodyPr/>
+                    <a:lstStyle/>
+                    <a:p>
+                      <a:pPr>
+                        <a:buNone/>
+                      </a:pPr>
+                      <a:r>
+                        <a:rPr lang="en-IN" sz="2000" dirty="0"/>
+                        <a:t>Statistics                                        </a:t>
+                      </a:r>
+                      <a:r>
+                        <a:rPr lang="en-IN" sz="2000" dirty="0">
+                          <a:sym typeface="Wingdings" panose="05000000000000000000" pitchFamily="2" charset="2"/>
+                        </a:rPr>
+                        <a:t></a:t>
+                      </a:r>
+                      <a:endParaRPr lang="en-IN" sz="2000" dirty="0"/>
+                    </a:p>
+                  </a:txBody>
+                  <a:tcPr anchor="ctr">
+                    <a:lnL>
+                      <a:noFill/>
+                    </a:lnL>
+                    <a:lnR>
+                      <a:noFill/>
+                    </a:lnR>
+                    <a:lnT>
+                      <a:noFill/>
+                    </a:lnT>
+                    <a:lnB>
+                      <a:noFill/>
+                    </a:lnB>
+                    <a:noFill/>
+                  </a:tcPr>
+                </a:tc>
+                <a:tc>
+                  <a:txBody>
+                    <a:bodyPr/>
+                    <a:lstStyle/>
+                    <a:p>
+                      <a:pPr>
+                        <a:buNone/>
+                      </a:pPr>
+                      <a:r>
+                        <a:rPr lang="en-IN" sz="2000">
+                          <a:latin typeface="Courier New" panose="02070309020205020404" pitchFamily="49" charset="0"/>
+                        </a:rPr>
+                        <a:t>median()</a:t>
+                      </a:r>
+                      <a:r>
+                        <a:rPr lang="en-IN" sz="2000"/>
+                        <a:t>, </a:t>
+                      </a:r>
+                      <a:r>
+                        <a:rPr lang="en-IN" sz="2000">
+                          <a:latin typeface="Courier New" panose="02070309020205020404" pitchFamily="49" charset="0"/>
+                        </a:rPr>
+                        <a:t>percentile()</a:t>
+                      </a:r>
+                      <a:r>
+                        <a:rPr lang="en-IN" sz="2000"/>
+                        <a:t>, </a:t>
+                      </a:r>
+                      <a:r>
+                        <a:rPr lang="en-IN" sz="2000">
+                          <a:latin typeface="Courier New" panose="02070309020205020404" pitchFamily="49" charset="0"/>
+                        </a:rPr>
+                        <a:t>corrcoef()</a:t>
+                      </a:r>
+                      <a:endParaRPr lang="en-IN" sz="2000"/>
+                    </a:p>
+                  </a:txBody>
+                  <a:tcPr anchor="ctr">
+                    <a:lnL>
+                      <a:noFill/>
+                    </a:lnL>
+                    <a:lnR>
+                      <a:noFill/>
+                    </a:lnR>
+                    <a:lnT>
+                      <a:noFill/>
+                    </a:lnT>
+                    <a:lnB>
+                      <a:noFill/>
+                    </a:lnB>
+                    <a:noFill/>
+                  </a:tcPr>
+                </a:tc>
+                <a:extLst>
+                  <a:ext uri="{0D108BD9-81ED-4DB2-BD59-A6C34878D82A}">
+                    <a16:rowId xmlns:a16="http://schemas.microsoft.com/office/drawing/2014/main" val="90178732"/>
+                  </a:ext>
+                </a:extLst>
+              </a:tr>
+              <a:tr h="0">
+                <a:tc>
+                  <a:txBody>
+                    <a:bodyPr/>
+                    <a:lstStyle/>
+                    <a:p>
+                      <a:pPr>
+                        <a:buNone/>
+                      </a:pPr>
+                      <a:r>
+                        <a:rPr lang="en-IN" sz="2000" dirty="0"/>
+                        <a:t>Sorting                                            </a:t>
+                      </a:r>
+                      <a:r>
+                        <a:rPr lang="en-IN" sz="2000" dirty="0">
+                          <a:sym typeface="Wingdings" panose="05000000000000000000" pitchFamily="2" charset="2"/>
+                        </a:rPr>
+                        <a:t></a:t>
+                      </a:r>
+                      <a:endParaRPr lang="en-IN" sz="2000" dirty="0"/>
+                    </a:p>
+                  </a:txBody>
+                  <a:tcPr anchor="ctr">
+                    <a:lnL>
+                      <a:noFill/>
+                    </a:lnL>
+                    <a:lnR>
+                      <a:noFill/>
+                    </a:lnR>
+                    <a:lnT>
+                      <a:noFill/>
+                    </a:lnT>
+                    <a:lnB>
+                      <a:noFill/>
+                    </a:lnB>
+                    <a:noFill/>
+                  </a:tcPr>
+                </a:tc>
+                <a:tc>
+                  <a:txBody>
+                    <a:bodyPr/>
+                    <a:lstStyle/>
+                    <a:p>
+                      <a:pPr>
+                        <a:buNone/>
+                      </a:pPr>
+                      <a:r>
+                        <a:rPr lang="en-IN" sz="2000" dirty="0">
+                          <a:latin typeface="Courier New" panose="02070309020205020404" pitchFamily="49" charset="0"/>
+                        </a:rPr>
+                        <a:t>sort()</a:t>
+                      </a:r>
+                      <a:r>
+                        <a:rPr lang="en-IN" sz="2000" dirty="0"/>
+                        <a:t>, </a:t>
+                      </a:r>
+                      <a:r>
+                        <a:rPr lang="en-IN" sz="2000" dirty="0">
+                          <a:latin typeface="Courier New" panose="02070309020205020404" pitchFamily="49" charset="0"/>
+                        </a:rPr>
+                        <a:t>where()</a:t>
+                      </a:r>
+                      <a:endParaRPr lang="en-IN" sz="2000" dirty="0"/>
+                    </a:p>
+                  </a:txBody>
+                  <a:tcPr anchor="ctr">
+                    <a:lnL>
+                      <a:noFill/>
+                    </a:lnL>
+                    <a:lnR>
+                      <a:noFill/>
+                    </a:lnR>
+                    <a:lnT>
+                      <a:noFill/>
+                    </a:lnT>
+                    <a:lnB>
+                      <a:noFill/>
+                    </a:lnB>
+                    <a:noFill/>
+                  </a:tcPr>
+                </a:tc>
+                <a:extLst>
+                  <a:ext uri="{0D108BD9-81ED-4DB2-BD59-A6C34878D82A}">
+                    <a16:rowId xmlns:a16="http://schemas.microsoft.com/office/drawing/2014/main" val="480904220"/>
+                  </a:ext>
+                </a:extLst>
+              </a:tr>
+            </a:tbl>
+          </a:graphicData>
+        </a:graphic>
+      </p:graphicFrame>
+      <p:sp>
+        <p:nvSpPr>
+          <p:cNvPr id="4" name="TextBox 3">
+            <a:extLst>
+              <a:ext uri="{FF2B5EF4-FFF2-40B4-BE49-F238E27FC236}">
+                <a16:creationId xmlns:a16="http://schemas.microsoft.com/office/drawing/2014/main" id="{A675C2AA-530B-033E-4173-9C6439850887}"/>
+              </a:ext>
+            </a:extLst>
+          </p:cNvPr>
+          <p:cNvSpPr txBox="1"/>
+          <p:nvPr/>
+        </p:nvSpPr>
+        <p:spPr>
+          <a:xfrm>
+            <a:off x="3418114" y="500742"/>
+            <a:ext cx="9622971" cy="461665"/>
+          </a:xfrm>
+          <a:prstGeom prst="rect">
+            <a:avLst/>
+          </a:prstGeom>
+          <a:noFill/>
+        </p:spPr>
+        <p:txBody>
+          <a:bodyPr wrap="square" rtlCol="0">
+            <a:spAutoFit/>
+          </a:bodyPr>
+          <a:lstStyle/>
+          <a:p>
+            <a:r>
+              <a:rPr lang="en-US" sz="2400" b="1" dirty="0"/>
+              <a:t>Different methods in NumPy</a:t>
+            </a:r>
+            <a:endParaRPr lang="en-IN" sz="2400" b="1" dirty="0"/>
+          </a:p>
+        </p:txBody>
+      </p:sp>
+    </p:spTree>
+    <p:extLst>
+      <p:ext uri="{BB962C8B-B14F-4D97-AF65-F5344CB8AC3E}">
+        <p14:creationId xmlns:p14="http://schemas.microsoft.com/office/powerpoint/2010/main" val="4236506072"/>
+      </p:ext>
+    </p:extLst>
+  </p:cSld>
+  <p:clrMapOvr>
+    <a:masterClrMapping/>
+  </p:clrMapOvr>
+</p:sld>
+</file>
+
+<file path=ppt/slides/slide9.xml><?xml version="1.0" encoding="utf-8"?>
+<p:sld xmlns:a="http://schemas.openxmlformats.org/drawingml/2006/main" xmlns:r="http://schemas.openxmlformats.org/officeDocument/2006/relationships" xmlns:p="http://schemas.openxmlformats.org/presentationml/2006/main">
+  <p:cSld>
+    <p:spTree>
+      <p:nvGrpSpPr>
+        <p:cNvPr id="1" name=""/>
+        <p:cNvGrpSpPr/>
+        <p:nvPr/>
+      </p:nvGrpSpPr>
+      <p:grpSpPr>
+        <a:xfrm>
+          <a:off x="0" y="0"/>
+          <a:ext cx="0" cy="0"/>
+          <a:chOff x="0" y="0"/>
+          <a:chExt cx="0" cy="0"/>
+        </a:xfrm>
+      </p:grpSpPr>
+    </p:spTree>
+    <p:extLst>
+      <p:ext uri="{BB962C8B-B14F-4D97-AF65-F5344CB8AC3E}">
+        <p14:creationId xmlns:p14="http://schemas.microsoft.com/office/powerpoint/2010/main" val="209417965"/>
       </p:ext>
     </p:extLst>
   </p:cSld>
